--- a/lessons/8-6/slides.pptx
+++ b/lessons/8-6/slides.pptx
@@ -10925,7 +10925,7 @@
       </p:sp>
       <p:sp>
         <p:nvSpPr>
-          <p:cNvPr id="20" name="Shape 18"/>
+          <p:cNvPr id="20" name="Text 18"/>
           <p:cNvSpPr/>
           <p:nvPr/>
         </p:nvSpPr>
@@ -10946,33 +10946,7 @@
             <a:solidFill>
               <a:srgbClr val="D6DBDF"/>
             </a:solidFill>
-            <a:prstDash val="solid"/>
           </a:ln>
-          <a:effectLst>
-            <a:outerShdw sx="100000" sy="100000" kx="0" ky="0" algn="bl" rotWithShape="0" blurRad="50800" dist="12700" dir="5400000">
-              <a:srgbClr val="1C2E42">
-                <a:alpha val="10000"/>
-              </a:srgbClr>
-            </a:outerShdw>
-          </a:effectLst>
-        </p:spPr>
-      </p:sp>
-      <p:sp>
-        <p:nvSpPr>
-          <p:cNvPr id="21" name="Text 19"/>
-          <p:cNvSpPr/>
-          <p:nvPr/>
-        </p:nvSpPr>
-        <p:spPr>
-          <a:xfrm>
-            <a:off x="685800" y="1481328"/>
-            <a:ext cx="1447800" cy="384048"/>
-          </a:xfrm>
-          <a:prstGeom prst="rect">
-            <a:avLst/>
-          </a:prstGeom>
-          <a:noFill/>
-          <a:ln/>
         </p:spPr>
         <p:txBody>
           <a:bodyPr wrap="square" rtlCol="0" anchor="ctr"/>
@@ -10982,7 +10956,7 @@
               <a:buNone/>
             </a:pPr>
             <a:r>
-              <a:rPr lang="en-US" sz="900" dirty="0">
+              <a:rPr lang="en-US" sz="900" b="1" dirty="0">
                 <a:solidFill>
                   <a:srgbClr val="17324D"/>
                 </a:solidFill>
@@ -10998,7 +10972,7 @@
       </p:sp>
       <p:sp>
         <p:nvSpPr>
-          <p:cNvPr id="22" name="Shape 20"/>
+          <p:cNvPr id="21" name="Text 19"/>
           <p:cNvSpPr/>
           <p:nvPr/>
         </p:nvSpPr>
@@ -11019,33 +10993,7 @@
             <a:solidFill>
               <a:srgbClr val="D6DBDF"/>
             </a:solidFill>
-            <a:prstDash val="solid"/>
           </a:ln>
-          <a:effectLst>
-            <a:outerShdw sx="100000" sy="100000" kx="0" ky="0" algn="bl" rotWithShape="0" blurRad="50800" dist="12700" dir="5400000">
-              <a:srgbClr val="1C2E42">
-                <a:alpha val="10000"/>
-              </a:srgbClr>
-            </a:outerShdw>
-          </a:effectLst>
-        </p:spPr>
-      </p:sp>
-      <p:sp>
-        <p:nvSpPr>
-          <p:cNvPr id="23" name="Text 21"/>
-          <p:cNvSpPr/>
-          <p:nvPr/>
-        </p:nvSpPr>
-        <p:spPr>
-          <a:xfrm>
-            <a:off x="2453640" y="1481328"/>
-            <a:ext cx="1447800" cy="384048"/>
-          </a:xfrm>
-          <a:prstGeom prst="rect">
-            <a:avLst/>
-          </a:prstGeom>
-          <a:noFill/>
-          <a:ln/>
         </p:spPr>
         <p:txBody>
           <a:bodyPr wrap="square" rtlCol="0" anchor="ctr"/>
@@ -11055,7 +11003,7 @@
               <a:buNone/>
             </a:pPr>
             <a:r>
-              <a:rPr lang="en-US" sz="900" dirty="0">
+              <a:rPr lang="en-US" sz="900" b="1" dirty="0">
                 <a:solidFill>
                   <a:srgbClr val="17324D"/>
                 </a:solidFill>
@@ -11071,7 +11019,7 @@
       </p:sp>
       <p:sp>
         <p:nvSpPr>
-          <p:cNvPr id="24" name="Shape 22"/>
+          <p:cNvPr id="22" name="Text 20"/>
           <p:cNvSpPr/>
           <p:nvPr/>
         </p:nvSpPr>
@@ -11092,33 +11040,7 @@
             <a:solidFill>
               <a:srgbClr val="D6DBDF"/>
             </a:solidFill>
-            <a:prstDash val="solid"/>
           </a:ln>
-          <a:effectLst>
-            <a:outerShdw sx="100000" sy="100000" kx="0" ky="0" algn="bl" rotWithShape="0" blurRad="50800" dist="12700" dir="5400000">
-              <a:srgbClr val="1C2E42">
-                <a:alpha val="10000"/>
-              </a:srgbClr>
-            </a:outerShdw>
-          </a:effectLst>
-        </p:spPr>
-      </p:sp>
-      <p:sp>
-        <p:nvSpPr>
-          <p:cNvPr id="25" name="Text 23"/>
-          <p:cNvSpPr/>
-          <p:nvPr/>
-        </p:nvSpPr>
-        <p:spPr>
-          <a:xfrm>
-            <a:off x="4221480" y="1481328"/>
-            <a:ext cx="1447800" cy="384048"/>
-          </a:xfrm>
-          <a:prstGeom prst="rect">
-            <a:avLst/>
-          </a:prstGeom>
-          <a:noFill/>
-          <a:ln/>
         </p:spPr>
         <p:txBody>
           <a:bodyPr wrap="square" rtlCol="0" anchor="ctr"/>
@@ -11128,7 +11050,7 @@
               <a:buNone/>
             </a:pPr>
             <a:r>
-              <a:rPr lang="en-US" sz="900" dirty="0">
+              <a:rPr lang="en-US" sz="900" b="1" dirty="0">
                 <a:solidFill>
                   <a:srgbClr val="17324D"/>
                 </a:solidFill>
@@ -11144,7 +11066,7 @@
       </p:sp>
       <p:sp>
         <p:nvSpPr>
-          <p:cNvPr id="26" name="Shape 24"/>
+          <p:cNvPr id="23" name="Text 21"/>
           <p:cNvSpPr/>
           <p:nvPr/>
         </p:nvSpPr>
@@ -11165,33 +11087,7 @@
             <a:solidFill>
               <a:srgbClr val="D6DBDF"/>
             </a:solidFill>
-            <a:prstDash val="solid"/>
           </a:ln>
-          <a:effectLst>
-            <a:outerShdw sx="100000" sy="100000" kx="0" ky="0" algn="bl" rotWithShape="0" blurRad="50800" dist="12700" dir="5400000">
-              <a:srgbClr val="1C2E42">
-                <a:alpha val="10000"/>
-              </a:srgbClr>
-            </a:outerShdw>
-          </a:effectLst>
-        </p:spPr>
-      </p:sp>
-      <p:sp>
-        <p:nvSpPr>
-          <p:cNvPr id="27" name="Text 25"/>
-          <p:cNvSpPr/>
-          <p:nvPr/>
-        </p:nvSpPr>
-        <p:spPr>
-          <a:xfrm>
-            <a:off x="685800" y="1975104"/>
-            <a:ext cx="1447800" cy="384048"/>
-          </a:xfrm>
-          <a:prstGeom prst="rect">
-            <a:avLst/>
-          </a:prstGeom>
-          <a:noFill/>
-          <a:ln/>
         </p:spPr>
         <p:txBody>
           <a:bodyPr wrap="square" rtlCol="0" anchor="ctr"/>
@@ -11201,7 +11097,7 @@
               <a:buNone/>
             </a:pPr>
             <a:r>
-              <a:rPr lang="en-US" sz="900" dirty="0">
+              <a:rPr lang="en-US" sz="900" b="1" dirty="0">
                 <a:solidFill>
                   <a:srgbClr val="17324D"/>
                 </a:solidFill>
@@ -11217,7 +11113,7 @@
       </p:sp>
       <p:sp>
         <p:nvSpPr>
-          <p:cNvPr id="28" name="Shape 26"/>
+          <p:cNvPr id="24" name="Shape 22"/>
           <p:cNvSpPr/>
           <p:nvPr/>
         </p:nvSpPr>
@@ -11251,7 +11147,7 @@
       </p:sp>
       <p:sp>
         <p:nvSpPr>
-          <p:cNvPr id="29" name="Text 27"/>
+          <p:cNvPr id="25" name="Text 23"/>
           <p:cNvSpPr/>
           <p:nvPr/>
         </p:nvSpPr>
@@ -11292,7 +11188,7 @@
       </p:sp>
       <p:sp>
         <p:nvSpPr>
-          <p:cNvPr id="30" name="Shape 28"/>
+          <p:cNvPr id="26" name="Shape 24"/>
           <p:cNvSpPr/>
           <p:nvPr/>
         </p:nvSpPr>
@@ -11326,7 +11222,7 @@
       </p:sp>
       <p:sp>
         <p:nvSpPr>
-          <p:cNvPr id="31" name="Text 29"/>
+          <p:cNvPr id="27" name="Text 25"/>
           <p:cNvSpPr/>
           <p:nvPr/>
         </p:nvSpPr>
@@ -11367,7 +11263,7 @@
       </p:sp>
       <p:sp>
         <p:nvSpPr>
-          <p:cNvPr id="32" name="Shape 30"/>
+          <p:cNvPr id="28" name="Shape 26"/>
           <p:cNvSpPr/>
           <p:nvPr/>
         </p:nvSpPr>
@@ -11401,7 +11297,7 @@
       </p:sp>
       <p:sp>
         <p:nvSpPr>
-          <p:cNvPr id="33" name="Text 31"/>
+          <p:cNvPr id="29" name="Text 27"/>
           <p:cNvSpPr/>
           <p:nvPr/>
         </p:nvSpPr>
@@ -11442,7 +11338,7 @@
       </p:sp>
       <p:sp>
         <p:nvSpPr>
-          <p:cNvPr id="34" name="Text 32"/>
+          <p:cNvPr id="30" name="Text 28"/>
           <p:cNvSpPr/>
           <p:nvPr/>
         </p:nvSpPr>
@@ -11481,7 +11377,7 @@
       </p:sp>
       <p:sp>
         <p:nvSpPr>
-          <p:cNvPr id="35" name="Shape 33"/>
+          <p:cNvPr id="31" name="Shape 29"/>
           <p:cNvSpPr/>
           <p:nvPr/>
         </p:nvSpPr>
@@ -11504,7 +11400,7 @@
       </p:sp>
       <p:sp>
         <p:nvSpPr>
-          <p:cNvPr id="36" name="Shape 34"/>
+          <p:cNvPr id="32" name="Shape 30"/>
           <p:cNvSpPr/>
           <p:nvPr/>
         </p:nvSpPr>
@@ -11527,7 +11423,7 @@
       </p:sp>
       <p:sp>
         <p:nvSpPr>
-          <p:cNvPr id="37" name="Shape 35"/>
+          <p:cNvPr id="33" name="Shape 31"/>
           <p:cNvSpPr/>
           <p:nvPr/>
         </p:nvSpPr>
@@ -11550,7 +11446,7 @@
       </p:sp>
       <p:sp>
         <p:nvSpPr>
-          <p:cNvPr id="38" name="Shape 36"/>
+          <p:cNvPr id="34" name="Shape 32"/>
           <p:cNvSpPr/>
           <p:nvPr/>
         </p:nvSpPr>
@@ -11573,7 +11469,7 @@
       </p:sp>
       <p:sp>
         <p:nvSpPr>
-          <p:cNvPr id="39" name="Shape 37"/>
+          <p:cNvPr id="35" name="Shape 33"/>
           <p:cNvSpPr/>
           <p:nvPr/>
         </p:nvSpPr>

--- a/lessons/8-6/slides.pptx
+++ b/lessons/8-6/slides.pptx
@@ -2584,7 +2584,7 @@
                 <a:ea typeface="Outfit" pitchFamily="34" charset="-122"/>
                 <a:cs typeface="Outfit" pitchFamily="34" charset="-120"/>
               </a:rPr>
-              <a:t>6.SP.4</a:t>
+              <a:t>6.DS.5</a:t>
             </a:r>
             <a:endParaRPr lang="en-US" sz="1000" dirty="0"/>
           </a:p>
@@ -3307,7 +3307,7 @@
                 <a:ea typeface="Outfit" pitchFamily="34" charset="-122"/>
                 <a:cs typeface="Outfit" pitchFamily="34" charset="-120"/>
               </a:rPr>
-              <a:t>6.SP.4</a:t>
+              <a:t>6.DS.5</a:t>
             </a:r>
             <a:endParaRPr lang="en-US" sz="900" dirty="0"/>
           </a:p>
@@ -4436,7 +4436,7 @@
                 <a:ea typeface="Outfit" pitchFamily="34" charset="-122"/>
                 <a:cs typeface="Outfit" pitchFamily="34" charset="-120"/>
               </a:rPr>
-              <a:t>6.SP.4</a:t>
+              <a:t>6.DS.5</a:t>
             </a:r>
             <a:endParaRPr lang="en-US" sz="900" dirty="0"/>
           </a:p>
@@ -5546,7 +5546,7 @@
                 <a:ea typeface="Outfit" pitchFamily="34" charset="-122"/>
                 <a:cs typeface="Outfit" pitchFamily="34" charset="-120"/>
               </a:rPr>
-              <a:t>6.SP.4</a:t>
+              <a:t>6.DS.5</a:t>
             </a:r>
             <a:endParaRPr lang="en-US" sz="900" dirty="0"/>
           </a:p>
@@ -6882,7 +6882,7 @@
                 <a:ea typeface="Outfit" pitchFamily="34" charset="-122"/>
                 <a:cs typeface="Outfit" pitchFamily="34" charset="-120"/>
               </a:rPr>
-              <a:t>6.SP.4</a:t>
+              <a:t>6.DS.5</a:t>
             </a:r>
             <a:endParaRPr lang="en-US" sz="900" dirty="0"/>
           </a:p>
@@ -8176,7 +8176,7 @@
                 <a:ea typeface="Outfit" pitchFamily="34" charset="-122"/>
                 <a:cs typeface="Outfit" pitchFamily="34" charset="-120"/>
               </a:rPr>
-              <a:t>6.SP.4</a:t>
+              <a:t>6.DS.5</a:t>
             </a:r>
             <a:endParaRPr lang="en-US" sz="900" dirty="0"/>
           </a:p>
@@ -9238,7 +9238,7 @@
                 <a:ea typeface="Outfit" pitchFamily="34" charset="-122"/>
                 <a:cs typeface="Outfit" pitchFamily="34" charset="-120"/>
               </a:rPr>
-              <a:t>6.SP.4</a:t>
+              <a:t>6.DS.5</a:t>
             </a:r>
             <a:endParaRPr lang="en-US" sz="900" dirty="0"/>
           </a:p>
@@ -10203,7 +10203,7 @@
                 <a:ea typeface="Outfit" pitchFamily="34" charset="-122"/>
                 <a:cs typeface="Outfit" pitchFamily="34" charset="-120"/>
               </a:rPr>
-              <a:t>6.SP.4</a:t>
+              <a:t>6.DS.5</a:t>
             </a:r>
             <a:endParaRPr lang="en-US" sz="900" dirty="0"/>
           </a:p>
@@ -11120,7 +11120,7 @@
                 <a:ea typeface="Outfit" pitchFamily="34" charset="-122"/>
                 <a:cs typeface="Outfit" pitchFamily="34" charset="-120"/>
               </a:rPr>
-              <a:t>6.SP.4</a:t>
+              <a:t>6.DS.5</a:t>
             </a:r>
             <a:endParaRPr lang="en-US" sz="900" dirty="0"/>
           </a:p>
@@ -11836,7 +11836,7 @@
                 <a:ea typeface="Hanken Grotesk" pitchFamily="34" charset="-122"/>
                 <a:cs typeface="Hanken Grotesk" pitchFamily="34" charset="-120"/>
               </a:rPr>
-              <a:t>A.  68–71 inches</a:t>
+              <a:t>A.  72–75 inches</a:t>
             </a:r>
             <a:endParaRPr lang="en-US" sz="1000" dirty="0"/>
           </a:p>
@@ -11875,7 +11875,7 @@
                 <a:ea typeface="Hanken Grotesk" pitchFamily="34" charset="-122"/>
                 <a:cs typeface="Hanken Grotesk" pitchFamily="34" charset="-120"/>
               </a:rPr>
-              <a:t>B.  64–67 inches</a:t>
+              <a:t>B.  60–63 inches</a:t>
             </a:r>
             <a:endParaRPr lang="en-US" sz="1000" dirty="0"/>
           </a:p>
@@ -11914,7 +11914,7 @@
                 <a:ea typeface="Hanken Grotesk" pitchFamily="34" charset="-122"/>
                 <a:cs typeface="Hanken Grotesk" pitchFamily="34" charset="-120"/>
               </a:rPr>
-              <a:t>C.  72–75 inches</a:t>
+              <a:t>C.  68–71 inches</a:t>
             </a:r>
             <a:endParaRPr lang="en-US" sz="1000" dirty="0"/>
           </a:p>
@@ -11953,7 +11953,7 @@
                 <a:ea typeface="Hanken Grotesk" pitchFamily="34" charset="-122"/>
                 <a:cs typeface="Hanken Grotesk" pitchFamily="34" charset="-120"/>
               </a:rPr>
-              <a:t>D.  60–63 inches</a:t>
+              <a:t>D.  64–67 inches</a:t>
             </a:r>
             <a:endParaRPr lang="en-US" sz="1000" dirty="0"/>
           </a:p>
@@ -12248,7 +12248,7 @@
                 <a:ea typeface="Outfit" pitchFamily="34" charset="-122"/>
                 <a:cs typeface="Outfit" pitchFamily="34" charset="-120"/>
               </a:rPr>
-              <a:t>6.SP.4</a:t>
+              <a:t>6.DS.5</a:t>
             </a:r>
             <a:endParaRPr lang="en-US" sz="900" dirty="0"/>
           </a:p>
@@ -13681,7 +13681,7 @@
                 <a:ea typeface="Outfit" pitchFamily="34" charset="-122"/>
                 <a:cs typeface="Outfit" pitchFamily="34" charset="-120"/>
               </a:rPr>
-              <a:t>6.SP.4</a:t>
+              <a:t>6.DS.5</a:t>
             </a:r>
             <a:endParaRPr lang="en-US" sz="900" dirty="0"/>
           </a:p>
@@ -14495,7 +14495,7 @@
                 <a:ea typeface="Outfit" pitchFamily="34" charset="-122"/>
                 <a:cs typeface="Outfit" pitchFamily="34" charset="-120"/>
               </a:rPr>
-              <a:t>6.SP.4</a:t>
+              <a:t>6.DS.5</a:t>
             </a:r>
             <a:endParaRPr lang="en-US" sz="900" dirty="0"/>
           </a:p>
@@ -15602,7 +15602,7 @@
                 <a:ea typeface="Outfit" pitchFamily="34" charset="-122"/>
                 <a:cs typeface="Outfit" pitchFamily="34" charset="-120"/>
               </a:rPr>
-              <a:t>6.SP.4</a:t>
+              <a:t>6.DS.5</a:t>
             </a:r>
             <a:endParaRPr lang="en-US" sz="900" dirty="0"/>
           </a:p>
@@ -16709,7 +16709,7 @@
                 <a:ea typeface="Outfit" pitchFamily="34" charset="-122"/>
                 <a:cs typeface="Outfit" pitchFamily="34" charset="-120"/>
               </a:rPr>
-              <a:t>6.SP.4</a:t>
+              <a:t>6.DS.5</a:t>
             </a:r>
             <a:endParaRPr lang="en-US" sz="900" dirty="0"/>
           </a:p>
@@ -17816,7 +17816,7 @@
                 <a:ea typeface="Outfit" pitchFamily="34" charset="-122"/>
                 <a:cs typeface="Outfit" pitchFamily="34" charset="-120"/>
               </a:rPr>
-              <a:t>6.SP.4</a:t>
+              <a:t>6.DS.5</a:t>
             </a:r>
             <a:endParaRPr lang="en-US" sz="900" dirty="0"/>
           </a:p>
@@ -18923,7 +18923,7 @@
                 <a:ea typeface="Outfit" pitchFamily="34" charset="-122"/>
                 <a:cs typeface="Outfit" pitchFamily="34" charset="-120"/>
               </a:rPr>
-              <a:t>6.SP.4</a:t>
+              <a:t>6.DS.5</a:t>
             </a:r>
             <a:endParaRPr lang="en-US" sz="900" dirty="0"/>
           </a:p>
@@ -19983,7 +19983,7 @@
                 <a:ea typeface="Outfit" pitchFamily="34" charset="-122"/>
                 <a:cs typeface="Outfit" pitchFamily="34" charset="-120"/>
               </a:rPr>
-              <a:t>6.SP.4</a:t>
+              <a:t>6.DS.5</a:t>
             </a:r>
             <a:endParaRPr lang="en-US" sz="900" dirty="0"/>
           </a:p>
@@ -20971,7 +20971,7 @@
                 <a:ea typeface="Outfit" pitchFamily="34" charset="-122"/>
                 <a:cs typeface="Outfit" pitchFamily="34" charset="-120"/>
               </a:rPr>
-              <a:t>6.SP.4</a:t>
+              <a:t>6.DS.5</a:t>
             </a:r>
             <a:endParaRPr lang="en-US" sz="900" dirty="0"/>
           </a:p>
@@ -22502,7 +22502,7 @@
                           <a:ea typeface="Hanken Grotesk" pitchFamily="34" charset="-122"/>
                           <a:cs typeface="Hanken Grotesk" pitchFamily="34" charset="-120"/>
                         </a:rPr>
-                        <a:t>Data distribution</a:t>
+                        <a:t>Variability</a:t>
                       </a:r>
                       <a:pPr indent="0" marL="0">
                         <a:buNone/>
@@ -22526,7 +22526,7 @@
                           <a:ea typeface="Hanken Grotesk" pitchFamily="34" charset="-122"/>
                           <a:cs typeface="Hanken Grotesk" pitchFamily="34" charset="-120"/>
                         </a:rPr>
-                        <a:t>Distribución de datos</a:t>
+                        <a:t>Variabilidad</a:t>
                       </a:r>
                       <a:endParaRPr lang="en-US" sz="950" dirty="0">
                         <a:latin typeface="Hanken Grotesk" charset="0"/>
@@ -22594,7 +22594,7 @@
                           <a:ea typeface="Hanken Grotesk" pitchFamily="34" charset="-122"/>
                           <a:cs typeface="Hanken Grotesk" pitchFamily="34" charset="-120"/>
                         </a:rPr>
-                        <a:t>How the data looks: where it sits and how spread out it is.</a:t>
+                        <a:t>How spread out the numbers are.</a:t>
                       </a:r>
                       <a:pPr indent="0" marL="0">
                         <a:buNone/>
@@ -22618,7 +22618,7 @@
                           <a:ea typeface="Hanken Grotesk" pitchFamily="34" charset="-122"/>
                           <a:cs typeface="Hanken Grotesk" pitchFamily="34" charset="-120"/>
                         </a:rPr>
-                        <a:t>Cómo se ven los datos: dónde están y qué tan separados están.</a:t>
+                        <a:t>Qué tan separados están los números.</a:t>
                       </a:r>
                       <a:endParaRPr lang="en-US" sz="900" dirty="0">
                         <a:latin typeface="Hanken Grotesk" charset="0"/>
@@ -22686,7 +22686,7 @@
                           <a:ea typeface="Hanken Grotesk" pitchFamily="34" charset="-122"/>
                           <a:cs typeface="Hanken Grotesk" pitchFamily="34" charset="-120"/>
                         </a:rPr>
-                        <a:t>A histogram that is tallest in the middle and shorter on both sides is symmetric</a:t>
+                        <a:t>Data in just 2 intervals = low variability. Data across 6 intervals = high variability</a:t>
                       </a:r>
                       <a:endParaRPr lang="en-US" sz="900" dirty="0">
                         <a:latin typeface="Hanken Grotesk" charset="0"/>
